--- a/dist/초1/환경·생태/생활습관/초1_환경·생태_생활습관_01_물·종이·전기아끼기_학생용.pptx
+++ b/dist/초1/환경·생태/생활습관/초1_환경·생태_생활습관_01_물·종이·전기아끼기_학생용.pptx
@@ -114,34 +114,34 @@
   <p:extLst>
     <p:ext uri="{521415D9-36F7-43E2-AB2F-B90AF26B5E84}">
       <p14:sectionLst xmlns:p14="http://schemas.microsoft.com/office/powerpoint/2010/main">
-        <p14:section name="도입" id="{3e4e1cf7-2b67-8e01-ec9c-1fc22b5d7683}">
+        <p14:section name="도입" id="{cda510dd-459b-05f6-608c-b9c79ba73ae4}">
           <p14:sldIdLst>
             <p14:sldId id="256"/>
             <p14:sldId id="257"/>
           </p14:sldIdLst>
         </p14:section>
-        <p14:section name="개념" id="{95b32f63-1624-980f-adb3-9ff63bd3e5d9}">
+        <p14:section name="개념" id="{35288d61-29c4-0609-02f5-d16885ce4f81}">
           <p14:sldIdLst>
             <p14:sldId id="258"/>
           </p14:sldIdLst>
         </p14:section>
-        <p14:section name="연습" id="{a466f555-5d57-b43b-6831-c7e14ce9a146}">
+        <p14:section name="연습" id="{dcb90e02-913b-7cfa-6cdb-0ee347f13dec}">
           <p14:sldIdLst>
             <p14:sldId id="259"/>
             <p14:sldId id="260"/>
           </p14:sldIdLst>
         </p14:section>
-        <p14:section name="확인" id="{80957b2f-1333-d49f-b500-de0558343451}">
+        <p14:section name="확인" id="{033b8dc0-0e62-e1b4-8940-266d579acc3d}">
           <p14:sldIdLst>
             <p14:sldId id="261"/>
           </p14:sldIdLst>
         </p14:section>
-        <p14:section name="정리" id="{e5e24b32-0392-e03b-eebc-1c029b887cc3}">
+        <p14:section name="정리" id="{b1324426-b522-8f0a-1e21-fd3ff54413eb}">
           <p14:sldIdLst>
             <p14:sldId id="262"/>
           </p14:sldIdLst>
         </p14:section>
-        <p14:section name="보충" id="{0db547e4-95d3-1f21-5c93-1ee947a46d6e}">
+        <p14:section name="보충" id="{005a566e-0aa0-87e2-573d-4a1a71467c60}">
           <p14:sldIdLst>
             <p14:sldId id="263"/>
           </p14:sldIdLst>
